--- a/media/exports/reports/2025-11/growth-trades.pptx
+++ b/media/exports/reports/2025-11/growth-trades.pptx
@@ -216,46 +216,46 @@
                 <c:formatCode>$#,##0;[Red]($#,##0);"-"</c:formatCode>
                 <c:ptCount val="14"/>
                 <c:pt idx="0">
-                  <c:v>171009</c:v>
+                  <c:v>191014</c:v>
                 </c:pt>
                 <c:pt idx="1">
-                  <c:v>179474</c:v>
+                  <c:v>200124</c:v>
                 </c:pt>
                 <c:pt idx="2">
-                  <c:v>143156</c:v>
+                  <c:v>159406</c:v>
                 </c:pt>
                 <c:pt idx="3">
-                  <c:v>140909</c:v>
+                  <c:v>156794</c:v>
                 </c:pt>
                 <c:pt idx="4">
-                  <c:v>160943</c:v>
+                  <c:v>179190</c:v>
                 </c:pt>
                 <c:pt idx="5">
-                  <c:v>135082</c:v>
+                  <c:v>150465</c:v>
                 </c:pt>
                 <c:pt idx="6">
-                  <c:v>124705</c:v>
+                  <c:v>138865</c:v>
                 </c:pt>
                 <c:pt idx="7">
-                  <c:v>129816</c:v>
+                  <c:v>144649</c:v>
                 </c:pt>
                 <c:pt idx="8">
-                  <c:v>164113</c:v>
+                  <c:v>183265</c:v>
                 </c:pt>
                 <c:pt idx="9">
-                  <c:v>186760</c:v>
+                  <c:v>208588</c:v>
                 </c:pt>
                 <c:pt idx="10">
-                  <c:v>139164</c:v>
+                  <c:v>155118</c:v>
                 </c:pt>
                 <c:pt idx="11">
-                  <c:v>128255</c:v>
+                  <c:v>143077</c:v>
                 </c:pt>
                 <c:pt idx="12">
-                  <c:v>128898</c:v>
+                  <c:v>143566</c:v>
                 </c:pt>
                 <c:pt idx="13">
-                  <c:v>174786</c:v>
+                  <c:v>194966</c:v>
                 </c:pt>
               </c:numCache>
             </c:numRef>
@@ -304,7 +304,7 @@
         <c:axId val="-2100718248"/>
         <c:scaling>
           <c:orientation val="minMax"/>
-          <c:max val="200000.0"/>
+          <c:max val="250000.0"/>
           <c:min val="0.0"/>
         </c:scaling>
         <c:delete val="0"/>
@@ -468,46 +468,46 @@
                 <c:formatCode>$#,##0;[Red]($#,##0);"-"</c:formatCode>
                 <c:ptCount val="14"/>
                 <c:pt idx="0">
-                  <c:v>24670</c:v>
+                  <c:v>27650</c:v>
                 </c:pt>
                 <c:pt idx="1">
-                  <c:v>24670</c:v>
+                  <c:v>27650</c:v>
                 </c:pt>
                 <c:pt idx="2">
-                  <c:v>24670</c:v>
+                  <c:v>27650</c:v>
                 </c:pt>
                 <c:pt idx="3">
-                  <c:v>24670</c:v>
+                  <c:v>27650</c:v>
                 </c:pt>
                 <c:pt idx="4">
-                  <c:v>27930</c:v>
+                  <c:v>31300</c:v>
                 </c:pt>
                 <c:pt idx="5">
-                  <c:v>27930</c:v>
+                  <c:v>31300</c:v>
                 </c:pt>
                 <c:pt idx="6">
-                  <c:v>27930</c:v>
+                  <c:v>31300</c:v>
                 </c:pt>
                 <c:pt idx="7">
-                  <c:v>27930</c:v>
+                  <c:v>31300</c:v>
                 </c:pt>
                 <c:pt idx="8">
-                  <c:v>31870</c:v>
+                  <c:v>35720</c:v>
                 </c:pt>
                 <c:pt idx="9">
-                  <c:v>33200</c:v>
+                  <c:v>37200</c:v>
                 </c:pt>
                 <c:pt idx="10">
-                  <c:v>33200</c:v>
+                  <c:v>37200</c:v>
                 </c:pt>
                 <c:pt idx="11">
-                  <c:v>33200</c:v>
+                  <c:v>37200</c:v>
                 </c:pt>
                 <c:pt idx="12">
-                  <c:v>35800</c:v>
+                  <c:v>40100</c:v>
                 </c:pt>
                 <c:pt idx="13">
-                  <c:v>35800</c:v>
+                  <c:v>40100</c:v>
                 </c:pt>
               </c:numCache>
             </c:numRef>
@@ -556,7 +556,7 @@
         <c:axId val="-2100718248"/>
         <c:scaling>
           <c:orientation val="minMax"/>
-          <c:max val="40000.0"/>
+          <c:max val="50000.0"/>
           <c:min val="0.0"/>
         </c:scaling>
         <c:delete val="0"/>
@@ -720,46 +720,46 @@
                 <c:formatCode>$#,##0;[Red]($#,##0);"-"</c:formatCode>
                 <c:ptCount val="14"/>
                 <c:pt idx="0">
+                  <c:v>141600</c:v>
+                </c:pt>
+                <c:pt idx="1">
+                  <c:v>147100</c:v>
+                </c:pt>
+                <c:pt idx="2">
+                  <c:v>103700</c:v>
+                </c:pt>
+                <c:pt idx="3">
+                  <c:v>100100</c:v>
+                </c:pt>
+                <c:pt idx="4">
+                  <c:v>118600</c:v>
+                </c:pt>
+                <c:pt idx="5">
+                  <c:v>96400</c:v>
+                </c:pt>
+                <c:pt idx="6">
+                  <c:v>83900</c:v>
+                </c:pt>
+                <c:pt idx="7">
+                  <c:v>89900</c:v>
+                </c:pt>
+                <c:pt idx="8">
                   <c:v>126300</c:v>
                 </c:pt>
-                <c:pt idx="1">
-                  <c:v>131400</c:v>
-                </c:pt>
-                <c:pt idx="2">
-                  <c:v>92600</c:v>
-                </c:pt>
-                <c:pt idx="3">
-                  <c:v>89400</c:v>
-                </c:pt>
-                <c:pt idx="4">
-                  <c:v>106000</c:v>
-                </c:pt>
-                <c:pt idx="5">
-                  <c:v>86100</c:v>
-                </c:pt>
-                <c:pt idx="6">
-                  <c:v>74900</c:v>
-                </c:pt>
-                <c:pt idx="7">
-                  <c:v>80300</c:v>
-                </c:pt>
-                <c:pt idx="8">
-                  <c:v>112700</c:v>
-                </c:pt>
                 <c:pt idx="9">
-                  <c:v>135800</c:v>
+                  <c:v>152100</c:v>
                 </c:pt>
                 <c:pt idx="10">
-                  <c:v>86200</c:v>
+                  <c:v>96500</c:v>
                 </c:pt>
                 <c:pt idx="11">
-                  <c:v>75100</c:v>
+                  <c:v>84200</c:v>
                 </c:pt>
                 <c:pt idx="12">
-                  <c:v>70800</c:v>
+                  <c:v>79300</c:v>
                 </c:pt>
                 <c:pt idx="13">
-                  <c:v>113300</c:v>
+                  <c:v>126900</c:v>
                 </c:pt>
               </c:numCache>
             </c:numRef>
@@ -808,7 +808,7 @@
         <c:axId val="-2100718248"/>
         <c:scaling>
           <c:orientation val="minMax"/>
-          <c:max val="150000.0"/>
+          <c:max val="200000.0"/>
           <c:min val="0.0"/>
         </c:scaling>
         <c:delete val="0"/>
@@ -972,46 +972,46 @@
                 <c:formatCode>$#,##0;[Red]($#,##0);"-"</c:formatCode>
                 <c:ptCount val="14"/>
                 <c:pt idx="0">
-                  <c:v>20039</c:v>
+                  <c:v>21764</c:v>
                 </c:pt>
                 <c:pt idx="1">
-                  <c:v>23404</c:v>
+                  <c:v>25374</c:v>
                 </c:pt>
                 <c:pt idx="2">
-                  <c:v>25886</c:v>
+                  <c:v>28056</c:v>
                 </c:pt>
                 <c:pt idx="3">
-                  <c:v>26839</c:v>
+                  <c:v>29044</c:v>
                 </c:pt>
                 <c:pt idx="4">
-                  <c:v>27013</c:v>
+                  <c:v>29290</c:v>
                 </c:pt>
                 <c:pt idx="5">
-                  <c:v>21052</c:v>
+                  <c:v>22765</c:v>
                 </c:pt>
                 <c:pt idx="6">
-                  <c:v>21875</c:v>
+                  <c:v>23665</c:v>
                 </c:pt>
                 <c:pt idx="7">
-                  <c:v>21586</c:v>
+                  <c:v>23449</c:v>
                 </c:pt>
                 <c:pt idx="8">
-                  <c:v>19543</c:v>
+                  <c:v>21245</c:v>
                 </c:pt>
                 <c:pt idx="9">
-                  <c:v>17760</c:v>
+                  <c:v>19288</c:v>
                 </c:pt>
                 <c:pt idx="10">
-                  <c:v>19764</c:v>
+                  <c:v>21418</c:v>
                 </c:pt>
                 <c:pt idx="11">
-                  <c:v>19955</c:v>
+                  <c:v>21677</c:v>
                 </c:pt>
                 <c:pt idx="12">
-                  <c:v>22298</c:v>
+                  <c:v>24166</c:v>
                 </c:pt>
                 <c:pt idx="13">
-                  <c:v>25686</c:v>
+                  <c:v>27966</c:v>
                 </c:pt>
               </c:numCache>
             </c:numRef>
@@ -1060,7 +1060,7 @@
         <c:axId val="-2100718248"/>
         <c:scaling>
           <c:orientation val="minMax"/>
-          <c:max val="30000.0"/>
+          <c:max val="40000.0"/>
           <c:min val="0.0"/>
         </c:scaling>
         <c:delete val="0"/>
@@ -1585,7 +1585,7 @@
           <a:lstStyle/>
           <a:p>
             <a:r>
-              <a:t>Trades · All. November against November last year: (2.6%); Year to date (Jul to Nov 2025): $757,863; Gross margin, year to date: 37.5%. Revenue is $757,863 this financial year to date (Jul to Nov 2025). Maintenance contracts make the highest gross margin (59.5%); Installations the lowest (28.2%). The business needs 31.4% gross margin just to cover overheads. Installations: 28.2% gross margin, 6.8 points under the 35.0% target: about $32,632 on $481,200 of revenue this financial year to date. It's below the 31.4% needed to cover overheads, too. Maintenance contracts: 59.5% gross margin, 24.5 points over the 35.0% target ($41,910 ahead on $171,200 this financial year to date).</a:t>
+              <a:t>Trades · All. November against November last year: (2.6%); Year to date (Jul to Nov 2025): $845,315; Gross margin, year to date: 43.9%. Revenue is $845,315 this financial year to date (Jul to Nov 2025). Maintenance contracts make the highest gross margin (63.8%); Installations the lowest (35.9%). The business needs 35.9% gross margin just to cover overheads. Installations: 35.9% gross margin, 0.9 points over the 35.0% target ($4,938 ahead on $539,000 this financial year to date). Maintenance contracts: 63.8% gross margin, 28.8 points over the 35.0% target ($55,300 ahead on $191,800 this financial year to date).</a:t>
             </a:r>
           </a:p>
         </p:txBody>
@@ -1655,7 +1655,7 @@
           <a:lstStyle/>
           <a:p>
             <a:r>
-              <a:t>Trades · Maintenance contracts. November against November last year: 45.1%; Year to date (Jul to Nov 2025): $171,200; Gross margin, year to date: 59.5%. Maintenance contracts brought in $171,200 this financial year to date, at a 59.5% gross margin (above the 37.5% overall). Maintenance contracts: 59.5% gross margin, 24.5 points over the 35.0% target ($41,910 ahead on $171,200 this financial year to date).</a:t>
+              <a:t>Trades · Maintenance contracts. November against November last year: 45.0%; Year to date (Jul to Nov 2025): $191,800; Gross margin, year to date: 63.8%. Maintenance contracts brought in $191,800 this financial year to date, at a 63.8% gross margin (above the 43.9% overall). Maintenance contracts: 63.8% gross margin, 28.8 points over the 35.0% target ($55,300 ahead on $191,800 this financial year to date).</a:t>
             </a:r>
           </a:p>
         </p:txBody>
@@ -1725,7 +1725,7 @@
           <a:lstStyle/>
           <a:p>
             <a:r>
-              <a:t>Trades · Installations. November against November last year: (13.8%); Year to date (Jul to Nov 2025): $481,200; Gross margin, year to date: 28.2%. Installations brought in $481,200 this financial year to date, at a 28.2% gross margin (below the 37.5% overall). Installations: 28.2% gross margin, 6.8 points under the 35.0% target: about $32,632 on $481,200 of revenue this financial year to date. It's below the 31.4% needed to cover overheads, too.</a:t>
+              <a:t>Trades · Installations. November against November last year: (13.7%); Year to date (Jul to Nov 2025): $539,000; Gross margin, year to date: 35.9%. Installations brought in $539,000 this financial year to date, at a 35.9% gross margin (below the 43.9% overall). Installations: 35.9% gross margin, 0.9 points over the 35.0% target ($4,938 ahead on $539,000 this financial year to date).</a:t>
             </a:r>
           </a:p>
         </p:txBody>
@@ -1795,7 +1795,7 @@
           <a:lstStyle/>
           <a:p>
             <a:r>
-              <a:t>Trades · Call-outs and repairs. November against November last year: 9.8%; Year to date (Jul to Nov 2025): $105,463; Gross margin, year to date: 43.8%. Call-outs and repairs brought in $105,463 this financial year to date, at a 43.8% gross margin (above the 37.5% overall). Call-outs and repairs: 43.8% gross margin, 8.8 points over the 35.0% target ($9,301 ahead on $105,463 this financial year to date).</a:t>
+              <a:t>Trades · Call-outs and repairs. November against November last year: 10.2%; Year to date (Jul to Nov 2025): $114,515; Gross margin, year to date: 48.3%. Call-outs and repairs brought in $114,515 this financial year to date, at a 48.3% gross margin (above the 43.9% overall). Call-outs and repairs: 48.3% gross margin, 13.3 points over the 35.0% target ($15,185 ahead on $114,515 this financial year to date).</a:t>
             </a:r>
           </a:p>
         </p:txBody>
@@ -1865,7 +1865,7 @@
           <a:lstStyle/>
           <a:p>
             <a:r>
-              <a:t>By line: financial year to date (Jul to Nov 2025) against the same period last year · Trades. Same period last year: Not available: the data starts October 2024. From gross margin to profit: November's jobs made $58,844 gross margin (33.7%). Technician time not charged to jobs took ($3,112) and overheads $57,960, leaving $3,996 profit before tax (2.3% of revenue). To cover overheads, jobs need a 31.4% gross margin on average.</a:t>
+              <a:t>By line: financial year to date (Jul to Nov 2025) against the same period last year · Trades. Same period last year: Not available: the data starts October 2024. From gross margin to profit: November's jobs made $79,024 gross margin (40.5%). Technician time not charged to jobs took $12,104 and overheads $57,960, leaving $8,960 profit before tax (4.6% of revenue). To cover overheads, jobs need a 35.9% gross margin on average.</a:t>
             </a:r>
           </a:p>
         </p:txBody>
@@ -5280,7 +5280,7 @@
                 </a:solidFill>
                 <a:latin typeface="Roboto"/>
               </a:rPr>
-              <a:t>Data retrieved 2pm, Tue 6 Oct 2026 · Generated 8 Oct 2026, 9:35am · Sample data · Made with Python (python-pptx)</a:t>
+              <a:t>Data retrieved 2pm, Tue 6 Oct 2026 · Generated 9 Oct 2026, 8:41am · Sample data · Made with Python (python-pptx)</a:t>
             </a:r>
           </a:p>
         </p:txBody>
@@ -5665,7 +5665,7 @@
                 </a:solidFill>
                 <a:latin typeface="Roboto"/>
               </a:rPr>
-              <a:t>$174,786 against $179,474</a:t>
+              <a:t>$194,966 against $200,124</a:t>
             </a:r>
           </a:p>
         </p:txBody>
@@ -5792,7 +5792,7 @@
                 </a:solidFill>
                 <a:latin typeface="Roboto"/>
               </a:rPr>
-              <a:t>$757,863</a:t>
+              <a:t>$845,315</a:t>
             </a:r>
           </a:p>
         </p:txBody>
@@ -5958,7 +5958,7 @@
                 </a:solidFill>
                 <a:latin typeface="Roboto"/>
               </a:rPr>
-              <a:t>37.5%</a:t>
+              <a:t>43.9%</a:t>
             </a:r>
           </a:p>
         </p:txBody>
@@ -5997,7 +5997,7 @@
                 </a:solidFill>
                 <a:latin typeface="Roboto"/>
               </a:rPr>
-              <a:t>$283,831 before overheads</a:t>
+              <a:t>$371,283 before overheads</a:t>
             </a:r>
           </a:p>
         </p:txBody>
@@ -6012,7 +6012,7 @@
         </p:nvGraphicFramePr>
         <p:xfrm>
           <a:off x="457200" y="2604516"/>
-          <a:ext cx="11277295" cy="2119884"/>
+          <a:ext cx="11277295" cy="2318004"/>
         </p:xfrm>
         <a:graphic>
           <a:graphicData uri="http://schemas.openxmlformats.org/drawingml/2006/chart">
@@ -6028,8 +6028,8 @@
         </p:nvSpPr>
         <p:spPr>
           <a:xfrm>
-            <a:off x="457200" y="4815840"/>
-            <a:ext cx="5501487" cy="1493520"/>
+            <a:off x="457200" y="5013960"/>
+            <a:ext cx="5501487" cy="1295400"/>
           </a:xfrm>
           <a:prstGeom prst="rect">
             <a:avLst/>
@@ -6077,7 +6077,7 @@
         </p:nvSpPr>
         <p:spPr>
           <a:xfrm>
-            <a:off x="594360" y="4870704"/>
+            <a:off x="594360" y="5068824"/>
             <a:ext cx="5227167" cy="274320"/>
           </a:xfrm>
           <a:prstGeom prst="rect">
@@ -6116,8 +6116,8 @@
         </p:nvSpPr>
         <p:spPr>
           <a:xfrm>
-            <a:off x="594360" y="5145024"/>
-            <a:ext cx="5227167" cy="1127760"/>
+            <a:off x="594360" y="5343144"/>
+            <a:ext cx="5227167" cy="929640"/>
           </a:xfrm>
           <a:prstGeom prst="rect">
             <a:avLst/>
@@ -6142,7 +6142,7 @@
                 </a:solidFill>
                 <a:latin typeface="Roboto"/>
               </a:rPr>
-              <a:t>Revenue is $757,863 this financial year to date (Jul to Nov 2025). Maintenance contracts make the highest gross margin (59.5%); Installations the lowest (28.2%). The business needs 31.4% gross margin just to cover overheads.</a:t>
+              <a:t>Revenue is $845,315 this financial year to date (Jul to Nov 2025). Maintenance contracts make the highest gross margin (63.8%); Installations the lowest (35.9%). The business needs 35.9% gross margin just to cover overheads.</a:t>
             </a:r>
           </a:p>
         </p:txBody>
@@ -6155,8 +6155,8 @@
         </p:nvSpPr>
         <p:spPr>
           <a:xfrm>
-            <a:off x="6233007" y="4815840"/>
-            <a:ext cx="5501487" cy="1493520"/>
+            <a:off x="6233007" y="5013960"/>
+            <a:ext cx="5501487" cy="1295400"/>
           </a:xfrm>
           <a:prstGeom prst="rect">
             <a:avLst/>
@@ -6204,7 +6204,7 @@
         </p:nvSpPr>
         <p:spPr>
           <a:xfrm>
-            <a:off x="6370167" y="4870704"/>
+            <a:off x="6370167" y="5068824"/>
             <a:ext cx="5227167" cy="274320"/>
           </a:xfrm>
           <a:prstGeom prst="rect">
@@ -6243,8 +6243,8 @@
         </p:nvSpPr>
         <p:spPr>
           <a:xfrm>
-            <a:off x="6370167" y="5145024"/>
-            <a:ext cx="5227167" cy="1127760"/>
+            <a:off x="6370167" y="5343144"/>
+            <a:ext cx="5227167" cy="929640"/>
           </a:xfrm>
           <a:prstGeom prst="rect">
             <a:avLst/>
@@ -6269,7 +6269,7 @@
                 </a:solidFill>
                 <a:latin typeface="Roboto"/>
               </a:rPr>
-              <a:t>Installations: 28.2% gross margin, 6.8 points under the 35.0% target: about $32,632 on $481,200 of revenue this financial year to date. It's below the 31.4% needed to cover overheads, too. Maintenance contracts: 59.5% gross margin, 24.5 points over the 35.0% target ($41,910 ahead on $171,200 this financial year to date).</a:t>
+              <a:t>Installations: 35.9% gross margin, 0.9 points over the 35.0% target ($4,938 ahead on $539,000 this financial year to date). Maintenance contracts: 63.8% gross margin, 28.8 points over the 35.0% target ($55,300 ahead on $191,800 this financial year to date).</a:t>
             </a:r>
           </a:p>
         </p:txBody>
@@ -6347,7 +6347,7 @@
                 </a:solidFill>
                 <a:latin typeface="Roboto"/>
               </a:rPr>
-              <a:t>Data retrieved 2pm, Tue 6 Oct 2026 · Generated 8 Oct 2026, 9:35am · Sample data · Made with Python (python-pptx)</a:t>
+              <a:t>Data retrieved 2pm, Tue 6 Oct 2026 · Generated 9 Oct 2026, 8:41am · Sample data · Made with Python (python-pptx)</a:t>
             </a:r>
           </a:p>
         </p:txBody>
@@ -6693,7 +6693,7 @@
                 </a:solidFill>
                 <a:latin typeface="Roboto"/>
               </a:rPr>
-              <a:t>45.1%</a:t>
+              <a:t>45.0%</a:t>
             </a:r>
           </a:p>
         </p:txBody>
@@ -6732,7 +6732,7 @@
                 </a:solidFill>
                 <a:latin typeface="Roboto"/>
               </a:rPr>
-              <a:t>$35,800 against $24,670</a:t>
+              <a:t>$40,100 against $27,650</a:t>
             </a:r>
           </a:p>
         </p:txBody>
@@ -6859,7 +6859,7 @@
                 </a:solidFill>
                 <a:latin typeface="Roboto"/>
               </a:rPr>
-              <a:t>$171,200</a:t>
+              <a:t>$191,800</a:t>
             </a:r>
           </a:p>
         </p:txBody>
@@ -7025,7 +7025,7 @@
                 </a:solidFill>
                 <a:latin typeface="Roboto"/>
               </a:rPr>
-              <a:t>59.5%</a:t>
+              <a:t>63.8%</a:t>
             </a:r>
           </a:p>
         </p:txBody>
@@ -7064,7 +7064,7 @@
                 </a:solidFill>
                 <a:latin typeface="Roboto"/>
               </a:rPr>
-              <a:t>$101,830 before overheads</a:t>
+              <a:t>$122,430 before overheads</a:t>
             </a:r>
           </a:p>
         </p:txBody>
@@ -7209,7 +7209,7 @@
                 </a:solidFill>
                 <a:latin typeface="Roboto"/>
               </a:rPr>
-              <a:t>Maintenance contracts brought in $171,200 this financial year to date, at a 59.5% gross margin (above the 37.5% overall).</a:t>
+              <a:t>Maintenance contracts brought in $191,800 this financial year to date, at a 63.8% gross margin (above the 43.9% overall).</a:t>
             </a:r>
           </a:p>
         </p:txBody>
@@ -7336,7 +7336,7 @@
                 </a:solidFill>
                 <a:latin typeface="Roboto"/>
               </a:rPr>
-              <a:t>Maintenance contracts: 59.5% gross margin, 24.5 points over the 35.0% target ($41,910 ahead on $171,200 this financial year to date).</a:t>
+              <a:t>Maintenance contracts: 63.8% gross margin, 28.8 points over the 35.0% target ($55,300 ahead on $191,800 this financial year to date).</a:t>
             </a:r>
           </a:p>
         </p:txBody>
@@ -7414,7 +7414,7 @@
                 </a:solidFill>
                 <a:latin typeface="Roboto"/>
               </a:rPr>
-              <a:t>Data retrieved 2pm, Tue 6 Oct 2026 · Generated 8 Oct 2026, 9:35am · Sample data · Made with Python (python-pptx)</a:t>
+              <a:t>Data retrieved 2pm, Tue 6 Oct 2026 · Generated 9 Oct 2026, 8:41am · Sample data · Made with Python (python-pptx)</a:t>
             </a:r>
           </a:p>
         </p:txBody>
@@ -7760,7 +7760,7 @@
                 </a:solidFill>
                 <a:latin typeface="Roboto"/>
               </a:rPr>
-              <a:t>(13.8%)</a:t>
+              <a:t>(13.7%)</a:t>
             </a:r>
           </a:p>
         </p:txBody>
@@ -7799,7 +7799,7 @@
                 </a:solidFill>
                 <a:latin typeface="Roboto"/>
               </a:rPr>
-              <a:t>$113,300 against $131,400</a:t>
+              <a:t>$126,900 against $147,100</a:t>
             </a:r>
           </a:p>
         </p:txBody>
@@ -7926,7 +7926,7 @@
                 </a:solidFill>
                 <a:latin typeface="Roboto"/>
               </a:rPr>
-              <a:t>$481,200</a:t>
+              <a:t>$539,000</a:t>
             </a:r>
           </a:p>
         </p:txBody>
@@ -8092,7 +8092,7 @@
                 </a:solidFill>
                 <a:latin typeface="Roboto"/>
               </a:rPr>
-              <a:t>28.2%</a:t>
+              <a:t>35.9%</a:t>
             </a:r>
           </a:p>
         </p:txBody>
@@ -8131,7 +8131,7 @@
                 </a:solidFill>
                 <a:latin typeface="Roboto"/>
               </a:rPr>
-              <a:t>$135,788 before overheads</a:t>
+              <a:t>$193,588 before overheads</a:t>
             </a:r>
           </a:p>
         </p:txBody>
@@ -8146,7 +8146,7 @@
         </p:nvGraphicFramePr>
         <p:xfrm>
           <a:off x="457200" y="2604516"/>
-          <a:ext cx="11277295" cy="2516124"/>
+          <a:ext cx="11277295" cy="2714244"/>
         </p:xfrm>
         <a:graphic>
           <a:graphicData uri="http://schemas.openxmlformats.org/drawingml/2006/chart">
@@ -8162,8 +8162,8 @@
         </p:nvSpPr>
         <p:spPr>
           <a:xfrm>
-            <a:off x="457200" y="5212080"/>
-            <a:ext cx="5501487" cy="1097280"/>
+            <a:off x="457200" y="5410200"/>
+            <a:ext cx="5501487" cy="899160"/>
           </a:xfrm>
           <a:prstGeom prst="rect">
             <a:avLst/>
@@ -8211,7 +8211,7 @@
         </p:nvSpPr>
         <p:spPr>
           <a:xfrm>
-            <a:off x="594360" y="5266944"/>
+            <a:off x="594360" y="5465064"/>
             <a:ext cx="5227167" cy="274320"/>
           </a:xfrm>
           <a:prstGeom prst="rect">
@@ -8250,8 +8250,8 @@
         </p:nvSpPr>
         <p:spPr>
           <a:xfrm>
-            <a:off x="594360" y="5541264"/>
-            <a:ext cx="5227167" cy="731520"/>
+            <a:off x="594360" y="5739384"/>
+            <a:ext cx="5227167" cy="533400"/>
           </a:xfrm>
           <a:prstGeom prst="rect">
             <a:avLst/>
@@ -8276,7 +8276,7 @@
                 </a:solidFill>
                 <a:latin typeface="Roboto"/>
               </a:rPr>
-              <a:t>Installations brought in $481,200 this financial year to date, at a 28.2% gross margin (below the 37.5% overall).</a:t>
+              <a:t>Installations brought in $539,000 this financial year to date, at a 35.9% gross margin (below the 43.9% overall).</a:t>
             </a:r>
           </a:p>
         </p:txBody>
@@ -8289,8 +8289,8 @@
         </p:nvSpPr>
         <p:spPr>
           <a:xfrm>
-            <a:off x="6233007" y="5212080"/>
-            <a:ext cx="5501487" cy="1097280"/>
+            <a:off x="6233007" y="5410200"/>
+            <a:ext cx="5501487" cy="899160"/>
           </a:xfrm>
           <a:prstGeom prst="rect">
             <a:avLst/>
@@ -8338,7 +8338,7 @@
         </p:nvSpPr>
         <p:spPr>
           <a:xfrm>
-            <a:off x="6370167" y="5266944"/>
+            <a:off x="6370167" y="5465064"/>
             <a:ext cx="5227167" cy="274320"/>
           </a:xfrm>
           <a:prstGeom prst="rect">
@@ -8377,8 +8377,8 @@
         </p:nvSpPr>
         <p:spPr>
           <a:xfrm>
-            <a:off x="6370167" y="5541264"/>
-            <a:ext cx="5227167" cy="731520"/>
+            <a:off x="6370167" y="5739384"/>
+            <a:ext cx="5227167" cy="533400"/>
           </a:xfrm>
           <a:prstGeom prst="rect">
             <a:avLst/>
@@ -8403,7 +8403,7 @@
                 </a:solidFill>
                 <a:latin typeface="Roboto"/>
               </a:rPr>
-              <a:t>Installations: 28.2% gross margin, 6.8 points under the 35.0% target: about $32,632 on $481,200 of revenue this financial year to date. It's below the 31.4% needed to cover overheads, too.</a:t>
+              <a:t>Installations: 35.9% gross margin, 0.9 points over the 35.0% target ($4,938 ahead on $539,000 this financial year to date).</a:t>
             </a:r>
           </a:p>
         </p:txBody>
@@ -8481,7 +8481,7 @@
                 </a:solidFill>
                 <a:latin typeface="Roboto"/>
               </a:rPr>
-              <a:t>Data retrieved 2pm, Tue 6 Oct 2026 · Generated 8 Oct 2026, 9:35am · Sample data · Made with Python (python-pptx)</a:t>
+              <a:t>Data retrieved 2pm, Tue 6 Oct 2026 · Generated 9 Oct 2026, 8:41am · Sample data · Made with Python (python-pptx)</a:t>
             </a:r>
           </a:p>
         </p:txBody>
@@ -8827,7 +8827,7 @@
                 </a:solidFill>
                 <a:latin typeface="Roboto"/>
               </a:rPr>
-              <a:t>9.8%</a:t>
+              <a:t>10.2%</a:t>
             </a:r>
           </a:p>
         </p:txBody>
@@ -8866,7 +8866,7 @@
                 </a:solidFill>
                 <a:latin typeface="Roboto"/>
               </a:rPr>
-              <a:t>$25,686 against $23,404</a:t>
+              <a:t>$27,966 against $25,374</a:t>
             </a:r>
           </a:p>
         </p:txBody>
@@ -8993,7 +8993,7 @@
                 </a:solidFill>
                 <a:latin typeface="Roboto"/>
               </a:rPr>
-              <a:t>$105,463</a:t>
+              <a:t>$114,515</a:t>
             </a:r>
           </a:p>
         </p:txBody>
@@ -9159,7 +9159,7 @@
                 </a:solidFill>
                 <a:latin typeface="Roboto"/>
               </a:rPr>
-              <a:t>43.8%</a:t>
+              <a:t>48.3%</a:t>
             </a:r>
           </a:p>
         </p:txBody>
@@ -9198,7 +9198,7 @@
                 </a:solidFill>
                 <a:latin typeface="Roboto"/>
               </a:rPr>
-              <a:t>$46,213 before overheads</a:t>
+              <a:t>$55,265 before overheads</a:t>
             </a:r>
           </a:p>
         </p:txBody>
@@ -9343,7 +9343,7 @@
                 </a:solidFill>
                 <a:latin typeface="Roboto"/>
               </a:rPr>
-              <a:t>Call-outs and repairs brought in $105,463 this financial year to date, at a 43.8% gross margin (above the 37.5% overall).</a:t>
+              <a:t>Call-outs and repairs brought in $114,515 this financial year to date, at a 48.3% gross margin (above the 43.9% overall).</a:t>
             </a:r>
           </a:p>
         </p:txBody>
@@ -9470,7 +9470,7 @@
                 </a:solidFill>
                 <a:latin typeface="Roboto"/>
               </a:rPr>
-              <a:t>Call-outs and repairs: 43.8% gross margin, 8.8 points over the 35.0% target ($9,301 ahead on $105,463 this financial year to date).</a:t>
+              <a:t>Call-outs and repairs: 48.3% gross margin, 13.3 points over the 35.0% target ($15,185 ahead on $114,515 this financial year to date).</a:t>
             </a:r>
           </a:p>
         </p:txBody>
@@ -9548,7 +9548,7 @@
                 </a:solidFill>
                 <a:latin typeface="Roboto"/>
               </a:rPr>
-              <a:t>Data retrieved 2pm, Tue 6 Oct 2026 · Generated 8 Oct 2026, 9:35am · Sample data · Made with Python (python-pptx)</a:t>
+              <a:t>Data retrieved 2pm, Tue 6 Oct 2026 · Generated 9 Oct 2026, 8:41am · Sample data · Made with Python (python-pptx)</a:t>
             </a:r>
           </a:p>
         </p:txBody>
@@ -9767,7 +9767,7 @@
                 </a:solidFill>
                 <a:latin typeface="Roboto"/>
               </a:rPr>
-              <a:t>Same period last year: Not available: the data starts October 2024. From gross margin to profit: November's jobs made $58,844 gross margin (33.7%). Technician time not charged to jobs took ($3,112) and overheads $57,960, leaving $3,996 profit before tax (2.3% of revenue). To cover overheads, jobs need a 31.4% gross margin on average.</a:t>
+              <a:t>Same period last year: Not available: the data starts October 2024. From gross margin to profit: November's jobs made $79,024 gross margin (40.5%). Technician time not charged to jobs took $12,104 and overheads $57,960, leaving $8,960 profit before tax (4.6% of revenue). To cover overheads, jobs need a 35.9% gross margin on average.</a:t>
             </a:r>
           </a:p>
         </p:txBody>
@@ -9998,7 +9998,7 @@
                           </a:solidFill>
                           <a:latin typeface="Roboto"/>
                         </a:rPr>
-                        <a:t>$171,200</a:t>
+                        <a:t>$191,800</a:t>
                       </a:r>
                     </a:p>
                   </a:txBody>
@@ -10079,7 +10079,7 @@
                           </a:solidFill>
                           <a:latin typeface="Roboto"/>
                         </a:rPr>
-                        <a:t>$101,830</a:t>
+                        <a:t>$122,430</a:t>
                       </a:r>
                     </a:p>
                   </a:txBody>
@@ -10106,7 +10106,7 @@
                           </a:solidFill>
                           <a:latin typeface="Roboto"/>
                         </a:rPr>
-                        <a:t>59.5%</a:t>
+                        <a:t>63.8%</a:t>
                       </a:r>
                     </a:p>
                   </a:txBody>
@@ -10162,7 +10162,7 @@
                           </a:solidFill>
                           <a:latin typeface="Roboto"/>
                         </a:rPr>
-                        <a:t>$481,200</a:t>
+                        <a:t>$539,000</a:t>
                       </a:r>
                     </a:p>
                   </a:txBody>
@@ -10243,7 +10243,7 @@
                           </a:solidFill>
                           <a:latin typeface="Roboto"/>
                         </a:rPr>
-                        <a:t>$135,788</a:t>
+                        <a:t>$193,588</a:t>
                       </a:r>
                     </a:p>
                   </a:txBody>
@@ -10270,7 +10270,7 @@
                           </a:solidFill>
                           <a:latin typeface="Roboto"/>
                         </a:rPr>
-                        <a:t>28.2%</a:t>
+                        <a:t>35.9%</a:t>
                       </a:r>
                     </a:p>
                   </a:txBody>
@@ -10326,7 +10326,7 @@
                           </a:solidFill>
                           <a:latin typeface="Roboto"/>
                         </a:rPr>
-                        <a:t>$105,463</a:t>
+                        <a:t>$114,515</a:t>
                       </a:r>
                     </a:p>
                   </a:txBody>
@@ -10407,7 +10407,7 @@
                           </a:solidFill>
                           <a:latin typeface="Roboto"/>
                         </a:rPr>
-                        <a:t>$46,213</a:t>
+                        <a:t>$55,265</a:t>
                       </a:r>
                     </a:p>
                   </a:txBody>
@@ -10434,7 +10434,7 @@
                           </a:solidFill>
                           <a:latin typeface="Roboto"/>
                         </a:rPr>
-                        <a:t>43.8%</a:t>
+                        <a:t>48.3%</a:t>
                       </a:r>
                     </a:p>
                   </a:txBody>
@@ -10490,7 +10490,7 @@
                           </a:solidFill>
                           <a:latin typeface="Roboto"/>
                         </a:rPr>
-                        <a:t>$757,863</a:t>
+                        <a:t>$845,315</a:t>
                       </a:r>
                     </a:p>
                   </a:txBody>
@@ -10571,7 +10571,7 @@
                           </a:solidFill>
                           <a:latin typeface="Roboto"/>
                         </a:rPr>
-                        <a:t>$283,831</a:t>
+                        <a:t>$371,283</a:t>
                       </a:r>
                     </a:p>
                   </a:txBody>
@@ -10598,7 +10598,7 @@
                           </a:solidFill>
                           <a:latin typeface="Roboto"/>
                         </a:rPr>
-                        <a:t>37.5%</a:t>
+                        <a:t>43.9%</a:t>
                       </a:r>
                     </a:p>
                   </a:txBody>
@@ -10686,7 +10686,7 @@
                 </a:solidFill>
                 <a:latin typeface="Roboto"/>
               </a:rPr>
-              <a:t>Data retrieved 2pm, Tue 6 Oct 2026 · Generated 8 Oct 2026, 9:35am · Sample data · Made with Python (python-pptx)</a:t>
+              <a:t>Data retrieved 2pm, Tue 6 Oct 2026 · Generated 9 Oct 2026, 8:41am · Sample data · Made with Python (python-pptx)</a:t>
             </a:r>
           </a:p>
         </p:txBody>
